--- a/public/fun/pack/pptx/talkpro/발표템플릿프리미엄_10_연말결산·회고_올리브샴페인.pptx
+++ b/public/fun/pack/pptx/talkpro/발표템플릿프리미엄_10_연말결산·회고_올리브샴페인.pptx
@@ -115,12 +115,12 @@
   <p:extLst>
     <p:ext uri="{521415D9-36F7-43E2-AB2F-B90AF26B5E84}">
       <p14:sectionLst xmlns:p14="http://schemas.microsoft.com/office/powerpoint/2010/main">
-        <p14:section name="시작" id="{44AA76E0-C2B2-4C91-95F8-6F8023DC7084}">
+        <p14:section name="시작" id="{6F476BE9-BE33-471F-BCB8-0AC14FF603CC}">
           <p14:sldIdLst>
             <p14:sldId id="256"/>
           </p14:sldIdLst>
         </p14:section>
-        <p14:section name="본문" id="{96D5A97B-8021-4A37-AA05-680BBFE805E6}">
+        <p14:section name="본문" id="{61A40F22-238A-4742-A429-B6F319BEF627}">
           <p14:sldIdLst>
             <p14:sldId id="257"/>
             <p14:sldId id="258"/>
@@ -131,7 +131,7 @@
             <p14:sldId id="263"/>
           </p14:sldIdLst>
         </p14:section>
-        <p14:section name="마무리" id="{33A700A8-00C4-4473-B7C4-FC7093338FF6}">
+        <p14:section name="마무리" id="{C6FCA015-AB90-45FE-AAAF-35050A59CADE}">
           <p14:sldIdLst>
             <p14:sldId id="264"/>
           </p14:sldIdLst>
@@ -1912,7 +1912,7 @@
             </a:lvl1pPr>
           </a:lstStyle>
           <a:p>
-            <a:fld id="{96CDD496-9978-45B1-AAEC-E4BCBB25721A}" type="slidenum">
+            <a:fld id="{8125EAF0-31CB-414D-8581-F9047FE3B3C9}" type="slidenum">
               <a:rPr lang="en-US"/>
               <a:t>‹#›</a:t>
             </a:fld>
@@ -2609,7 +2609,7 @@
             </a:lvl1pPr>
           </a:lstStyle>
           <a:p>
-            <a:fld id="{4A16CE73-D45A-4981-8792-E0DC8875CE94}" type="slidenum">
+            <a:fld id="{97ABA026-46CD-4685-8344-7B8CC8376F55}" type="slidenum">
               <a:rPr lang="en-US"/>
               <a:t>‹#›</a:t>
             </a:fld>
@@ -3279,7 +3279,7 @@
             </a:lvl1pPr>
           </a:lstStyle>
           <a:p>
-            <a:fld id="{CD430894-E4C9-4858-B1BC-EA51C004F8EF}" type="slidenum">
+            <a:fld id="{9E42F0F9-D58B-4924-8DB5-9DD91056DF17}" type="slidenum">
               <a:rPr lang="en-US"/>
               <a:t>‹#›</a:t>
             </a:fld>
@@ -4170,7 +4170,7 @@
           <a:p>
             <a:r>
               <a:rPr lang="ko-KR"/>
-              <a:t>0000. 00. 00</a:t>
+              <a:t>날짜 입력</a:t>
             </a:r>
           </a:p>
         </p:txBody>
@@ -4255,7 +4255,7 @@
           <a:bodyPr/>
           <a:lstStyle/>
           <a:p>
-            <a:fld id="{FCE455BA-AE50-4339-803A-FBF522A94E1D}" type="slidenum">
+            <a:fld id="{63E8284C-8BAF-42AF-9729-4D67D4870424}" type="slidenum">
               <a:rPr lang="en-US"/>
               <a:t>‹#›</a:t>
             </a:fld>
@@ -5441,7 +5441,7 @@
           <a:bodyPr/>
           <a:lstStyle/>
           <a:p>
-            <a:fld id="{26DF565E-D74B-4175-96A5-7034D15D2977}" type="slidenum">
+            <a:fld id="{F0B2572A-5986-45B4-B0C7-34083CD7EDE3}" type="slidenum">
               <a:rPr lang="en-US"/>
               <a:t>‹#›</a:t>
             </a:fld>
@@ -5529,7 +5529,7 @@
           <a:bodyPr/>
           <a:lstStyle/>
           <a:p>
-            <a:fld id="{DBFBE674-7E39-430B-8F37-B6FC5D1800A4}" type="slidenum">
+            <a:fld id="{827071CA-B981-40F5-89AD-542FB6DF9C68}" type="slidenum">
               <a:rPr lang="en-US"/>
               <a:t>‹#›</a:t>
             </a:fld>
@@ -6490,7 +6490,7 @@
           <a:bodyPr/>
           <a:lstStyle/>
           <a:p>
-            <a:fld id="{219CFB15-34FB-4A45-A69C-4A6DCA604B8C}" type="slidenum">
+            <a:fld id="{DE8509B4-FD31-4973-A94C-4097DDD5636D}" type="slidenum">
               <a:rPr lang="en-US"/>
               <a:t>‹#›</a:t>
             </a:fld>
@@ -7130,7 +7130,7 @@
           <a:bodyPr/>
           <a:lstStyle/>
           <a:p>
-            <a:fld id="{1DC3EF6C-7F8B-474B-8B9F-DD31FD01C3E6}" type="slidenum">
+            <a:fld id="{B13F6283-A9E9-47BE-8BC3-80D44F8EEE24}" type="slidenum">
               <a:rPr lang="en-US"/>
               <a:t>‹#›</a:t>
             </a:fld>
@@ -7313,7 +7313,7 @@
           <a:bodyPr/>
           <a:lstStyle/>
           <a:p>
-            <a:fld id="{F09FEAB8-CB18-4350-B7CA-27BE727C7873}" type="slidenum">
+            <a:fld id="{9AE2B7D8-8725-42DB-910C-7E5D9F670DCE}" type="slidenum">
               <a:rPr lang="en-US"/>
               <a:t>‹#›</a:t>
             </a:fld>
@@ -8377,7 +8377,7 @@
           <a:bodyPr/>
           <a:lstStyle/>
           <a:p>
-            <a:fld id="{DAD8E6BA-C60C-42C1-8513-4C22718214BA}" type="slidenum">
+            <a:fld id="{7982346B-CB5B-49C2-BA42-80C4C767A925}" type="slidenum">
               <a:rPr lang="en-US"/>
               <a:t>‹#›</a:t>
             </a:fld>
